--- a/Final_Report/Figures/CapstonePosterDraft.pptx
+++ b/Final_Report/Figures/CapstonePosterDraft.pptx
@@ -543,7 +543,7 @@
               <a:pPr>
                 <a:defRPr/>
               </a:pPr>
-              <a:t>11/19/2025</a:t>
+              <a:t>12/7/2025</a:t>
             </a:fld>
             <a:endParaRPr lang="en-US" altLang="en-US"/>
           </a:p>
@@ -3445,8 +3445,8 @@
         </p:nvSpPr>
         <p:spPr>
           <a:xfrm>
-            <a:off x="13835045" y="17669890"/>
-            <a:ext cx="11875167" cy="1316224"/>
+            <a:off x="13835045" y="19411363"/>
+            <a:ext cx="11875167" cy="1323202"/>
           </a:xfrm>
           <a:prstGeom prst="rect">
             <a:avLst/>
@@ -3720,7 +3720,7 @@
         <p:spPr>
           <a:xfrm>
             <a:off x="13886544" y="4963152"/>
-            <a:ext cx="11840835" cy="12463070"/>
+            <a:ext cx="11840835" cy="8884019"/>
           </a:xfrm>
           <a:prstGeom prst="rect">
             <a:avLst/>
@@ -3896,8 +3896,8 @@
         </p:nvSpPr>
         <p:spPr>
           <a:xfrm>
-            <a:off x="13852212" y="17642452"/>
-            <a:ext cx="11840835" cy="13218547"/>
+            <a:off x="13852212" y="19411363"/>
+            <a:ext cx="11840835" cy="11449636"/>
           </a:xfrm>
           <a:prstGeom prst="rect">
             <a:avLst/>
@@ -4227,222 +4227,6 @@
           </a:p>
         </p:txBody>
       </p:sp>
-      <p:sp>
-        <p:nvSpPr>
-          <p:cNvPr id="20" name="TextBox 19">
-            <a:extLst>
-              <a:ext uri="{FF2B5EF4-FFF2-40B4-BE49-F238E27FC236}">
-                <a16:creationId xmlns:a16="http://schemas.microsoft.com/office/drawing/2014/main" id="{5BC796CB-FF76-1334-115A-85D13A3682C9}"/>
-              </a:ext>
-            </a:extLst>
-          </p:cNvPr>
-          <p:cNvSpPr txBox="1"/>
-          <p:nvPr/>
-        </p:nvSpPr>
-        <p:spPr>
-          <a:xfrm>
-            <a:off x="14051144" y="6561374"/>
-            <a:ext cx="11409329" cy="5632311"/>
-          </a:xfrm>
-          <a:prstGeom prst="rect">
-            <a:avLst/>
-          </a:prstGeom>
-          <a:noFill/>
-        </p:spPr>
-        <p:txBody>
-          <a:bodyPr wrap="square">
-            <a:spAutoFit/>
-          </a:bodyPr>
-          <a:lstStyle/>
-          <a:p>
-            <a:r>
-              <a:rPr lang="en-US" sz="3600" dirty="0"/>
-              <a:t>Despite growing interest in non-invasive deep brain stimulation (NIDBS) as a safer and more accessible alternative to surgical methods, current technologies rely on large, expensive, and highly specialized equipment. These systems are confined to clinical or research environments, limiting their availability and preventing continuous or at-home use. At present, no portable or affordable devices exist that can deliver effective non-invasive deep brain stimulation, creating a significant barrier to broader adoption and real-world therapeutic impact.</a:t>
-            </a:r>
-          </a:p>
-        </p:txBody>
-      </p:sp>
-      <p:sp>
-        <p:nvSpPr>
-          <p:cNvPr id="22" name="TextBox 21">
-            <a:extLst>
-              <a:ext uri="{FF2B5EF4-FFF2-40B4-BE49-F238E27FC236}">
-                <a16:creationId xmlns:a16="http://schemas.microsoft.com/office/drawing/2014/main" id="{8D63E3B7-F9FC-740E-1CE2-8401B01D4095}"/>
-              </a:ext>
-            </a:extLst>
-          </p:cNvPr>
-          <p:cNvSpPr txBox="1"/>
-          <p:nvPr/>
-        </p:nvSpPr>
-        <p:spPr>
-          <a:xfrm>
-            <a:off x="14051144" y="19298632"/>
-            <a:ext cx="11641903" cy="4429995"/>
-          </a:xfrm>
-          <a:prstGeom prst="rect">
-            <a:avLst/>
-          </a:prstGeom>
-          <a:noFill/>
-        </p:spPr>
-        <p:txBody>
-          <a:bodyPr wrap="square">
-            <a:spAutoFit/>
-          </a:bodyPr>
-          <a:lstStyle/>
-          <a:p>
-            <a:pPr algn="l">
-              <a:buNone/>
-            </a:pPr>
-            <a:r>
-              <a:rPr lang="en-US" sz="3200" b="0" i="0" dirty="0">
-                <a:solidFill>
-                  <a:srgbClr val="000000"/>
-                </a:solidFill>
-                <a:effectLst/>
-                <a:latin typeface="Arial" panose="020B0604020202020204" pitchFamily="34" charset="0"/>
-              </a:rPr>
-              <a:t>Apply two sinusoidal currents with slightly</a:t>
-            </a:r>
-            <a:br>
-              <a:rPr lang="en-US" sz="3200" b="0" i="0" dirty="0">
-                <a:solidFill>
-                  <a:srgbClr val="000000"/>
-                </a:solidFill>
-                <a:effectLst/>
-                <a:latin typeface="Lato" panose="020F0502020204030203" pitchFamily="34" charset="0"/>
-              </a:rPr>
-            </a:br>
-            <a:r>
-              <a:rPr lang="en-US" sz="3200" b="0" i="0" dirty="0">
-                <a:solidFill>
-                  <a:srgbClr val="000000"/>
-                </a:solidFill>
-                <a:effectLst/>
-                <a:latin typeface="Arial" panose="020B0604020202020204" pitchFamily="34" charset="0"/>
-              </a:rPr>
-              <a:t>different frequencies</a:t>
-            </a:r>
-            <a:br>
-              <a:rPr lang="en-US" sz="3200" b="0" i="0" dirty="0">
-                <a:solidFill>
-                  <a:srgbClr val="000000"/>
-                </a:solidFill>
-                <a:effectLst/>
-                <a:latin typeface="Lato" panose="020F0502020204030203" pitchFamily="34" charset="0"/>
-              </a:rPr>
-            </a:br>
-            <a:r>
-              <a:rPr lang="en-US" sz="3200" b="0" i="0" dirty="0">
-                <a:solidFill>
-                  <a:srgbClr val="000000"/>
-                </a:solidFill>
-                <a:effectLst/>
-                <a:latin typeface="Arial" panose="020B0604020202020204" pitchFamily="34" charset="0"/>
-              </a:rPr>
-              <a:t>• f1 and f2 are at frequencies that the human</a:t>
-            </a:r>
-            <a:br>
-              <a:rPr lang="en-US" sz="3200" b="0" i="0" dirty="0">
-                <a:solidFill>
-                  <a:srgbClr val="000000"/>
-                </a:solidFill>
-                <a:effectLst/>
-                <a:latin typeface="Lato" panose="020F0502020204030203" pitchFamily="34" charset="0"/>
-              </a:rPr>
-            </a:br>
-            <a:r>
-              <a:rPr lang="en-US" sz="3200" b="0" i="0" dirty="0">
-                <a:solidFill>
-                  <a:srgbClr val="000000"/>
-                </a:solidFill>
-                <a:effectLst/>
-                <a:latin typeface="Arial" panose="020B0604020202020204" pitchFamily="34" charset="0"/>
-              </a:rPr>
-              <a:t>brain does not respond to</a:t>
-            </a:r>
-            <a:br>
-              <a:rPr lang="en-US" sz="3200" b="0" i="0" dirty="0">
-                <a:solidFill>
-                  <a:srgbClr val="000000"/>
-                </a:solidFill>
-                <a:effectLst/>
-                <a:latin typeface="Lato" panose="020F0502020204030203" pitchFamily="34" charset="0"/>
-              </a:rPr>
-            </a:br>
-            <a:r>
-              <a:rPr lang="en-US" sz="3200" b="0" i="0" dirty="0">
-                <a:solidFill>
-                  <a:srgbClr val="000000"/>
-                </a:solidFill>
-                <a:effectLst/>
-                <a:latin typeface="Arial" panose="020B0604020202020204" pitchFamily="34" charset="0"/>
-              </a:rPr>
-              <a:t>• The beat frequency is at a frequency that</a:t>
-            </a:r>
-            <a:br>
-              <a:rPr lang="en-US" sz="3200" b="0" i="0" dirty="0">
-                <a:solidFill>
-                  <a:srgbClr val="000000"/>
-                </a:solidFill>
-                <a:effectLst/>
-                <a:latin typeface="Lato" panose="020F0502020204030203" pitchFamily="34" charset="0"/>
-              </a:rPr>
-            </a:br>
-            <a:r>
-              <a:rPr lang="en-US" sz="3200" b="0" i="0" dirty="0">
-                <a:solidFill>
-                  <a:srgbClr val="000000"/>
-                </a:solidFill>
-                <a:effectLst/>
-                <a:latin typeface="Arial" panose="020B0604020202020204" pitchFamily="34" charset="0"/>
-              </a:rPr>
-              <a:t>the human brain responds to</a:t>
-            </a:r>
-            <a:br>
-              <a:rPr lang="en-US" sz="3200" b="0" i="0" dirty="0">
-                <a:solidFill>
-                  <a:srgbClr val="000000"/>
-                </a:solidFill>
-                <a:effectLst/>
-                <a:latin typeface="Lato" panose="020F0502020204030203" pitchFamily="34" charset="0"/>
-              </a:rPr>
-            </a:br>
-            <a:r>
-              <a:rPr lang="en-US" sz="3200" b="0" i="0" dirty="0">
-                <a:solidFill>
-                  <a:srgbClr val="000000"/>
-                </a:solidFill>
-                <a:effectLst/>
-                <a:latin typeface="Arial" panose="020B0604020202020204" pitchFamily="34" charset="0"/>
-              </a:rPr>
-              <a:t>• This allows you to target deep areas of the</a:t>
-            </a:r>
-            <a:br>
-              <a:rPr lang="en-US" sz="3200" b="0" i="0" dirty="0">
-                <a:solidFill>
-                  <a:srgbClr val="000000"/>
-                </a:solidFill>
-                <a:effectLst/>
-                <a:latin typeface="Lato" panose="020F0502020204030203" pitchFamily="34" charset="0"/>
-              </a:rPr>
-            </a:br>
-            <a:r>
-              <a:rPr lang="en-US" sz="3200" b="0" i="0" dirty="0">
-                <a:solidFill>
-                  <a:srgbClr val="000000"/>
-                </a:solidFill>
-                <a:effectLst/>
-                <a:latin typeface="Arial" panose="020B0604020202020204" pitchFamily="34" charset="0"/>
-              </a:rPr>
-              <a:t>brain</a:t>
-            </a:r>
-            <a:br>
-              <a:rPr lang="en-US" dirty="0"/>
-            </a:br>
-            <a:endParaRPr lang="en-US" dirty="0"/>
-          </a:p>
-        </p:txBody>
-      </p:sp>
       <p:pic>
         <p:nvPicPr>
           <p:cNvPr id="1026" name="Picture 2" descr="Temporal Interference Stimulation - A New Application for Pairs of DS5  Stimulators | Digitimer">
@@ -4472,8 +4256,8 @@
         </p:blipFill>
         <p:spPr bwMode="auto">
           <a:xfrm>
-            <a:off x="16377740" y="22948356"/>
-            <a:ext cx="7494643" cy="7494643"/>
+            <a:off x="17297400" y="24197555"/>
+            <a:ext cx="6400800" cy="6400800"/>
           </a:xfrm>
           <a:prstGeom prst="rect">
             <a:avLst/>
@@ -4490,51 +4274,490 @@
           </a:extLst>
         </p:spPr>
       </p:pic>
-      <p:pic>
-        <p:nvPicPr>
-          <p:cNvPr id="1028" name="Picture 4" descr="What is a BrainsWay Deep TMS Device? - BrainsWay">
+      <p:sp>
+        <p:nvSpPr>
+          <p:cNvPr id="17" name="TextBox 16">
             <a:extLst>
               <a:ext uri="{FF2B5EF4-FFF2-40B4-BE49-F238E27FC236}">
-                <a16:creationId xmlns:a16="http://schemas.microsoft.com/office/drawing/2014/main" id="{EDC2344A-FA0F-D18F-E117-6FEF0A613FBC}"/>
+                <a16:creationId xmlns:a16="http://schemas.microsoft.com/office/drawing/2014/main" id="{85514006-BE46-F7E8-F378-9DB1BBC08959}"/>
               </a:ext>
             </a:extLst>
           </p:cNvPr>
-          <p:cNvPicPr>
-            <a:picLocks noChangeAspect="1" noChangeArrowheads="1"/>
-          </p:cNvPicPr>
+          <p:cNvSpPr txBox="1"/>
           <p:nvPr/>
-        </p:nvPicPr>
-        <p:blipFill>
-          <a:blip r:embed="rId5">
-            <a:extLst>
-              <a:ext uri="{28A0092B-C50C-407E-A947-70E740481C1C}">
-                <a14:useLocalDpi xmlns:a14="http://schemas.microsoft.com/office/drawing/2010/main" val="0"/>
-              </a:ext>
-            </a:extLst>
-          </a:blip>
-          <a:srcRect/>
-          <a:stretch>
-            <a:fillRect/>
-          </a:stretch>
-        </p:blipFill>
-        <p:spPr bwMode="auto">
+        </p:nvSpPr>
+        <p:spPr>
           <a:xfrm>
-            <a:off x="15697200" y="12397937"/>
-            <a:ext cx="7696200" cy="4998673"/>
+            <a:off x="359829" y="25450800"/>
+            <a:ext cx="13231995" cy="4154984"/>
           </a:xfrm>
           <a:prstGeom prst="rect">
             <a:avLst/>
           </a:prstGeom>
           <a:noFill/>
-          <a:extLst>
-            <a:ext uri="{909E8E84-426E-40DD-AFC4-6F175D3DCCD1}">
-              <a14:hiddenFill xmlns:a14="http://schemas.microsoft.com/office/drawing/2010/main">
-                <a:solidFill>
-                  <a:srgbClr val="FFFFFF"/>
-                </a:solidFill>
-              </a14:hiddenFill>
-            </a:ext>
-          </a:extLst>
+        </p:spPr>
+        <p:txBody>
+          <a:bodyPr wrap="square">
+            <a:spAutoFit/>
+          </a:bodyPr>
+          <a:lstStyle/>
+          <a:p>
+            <a:pPr marL="571500" indent="-571500">
+              <a:buFont typeface="Arial" panose="020B0604020202020204" pitchFamily="34" charset="0"/>
+              <a:buChar char="•"/>
+            </a:pPr>
+            <a:r>
+              <a:rPr lang="en-US" sz="4400" dirty="0"/>
+              <a:t>Pipelined amplifier stages</a:t>
+            </a:r>
+          </a:p>
+          <a:p>
+            <a:pPr marL="571500" indent="-571500">
+              <a:buFont typeface="Arial" panose="020B0604020202020204" pitchFamily="34" charset="0"/>
+              <a:buChar char="•"/>
+            </a:pPr>
+            <a:r>
+              <a:rPr lang="en-US" sz="4400" dirty="0"/>
+              <a:t>Precise control using DDS</a:t>
+            </a:r>
+          </a:p>
+          <a:p>
+            <a:pPr marL="571500" indent="-571500">
+              <a:buFont typeface="Arial" panose="020B0604020202020204" pitchFamily="34" charset="0"/>
+              <a:buChar char="•"/>
+            </a:pPr>
+            <a:r>
+              <a:rPr lang="en-US" sz="4400" dirty="0"/>
+              <a:t>Ramp function to reduce pain</a:t>
+            </a:r>
+          </a:p>
+          <a:p>
+            <a:pPr marL="571500" indent="-571500">
+              <a:buFont typeface="Arial" panose="020B0604020202020204" pitchFamily="34" charset="0"/>
+              <a:buChar char="•"/>
+            </a:pPr>
+            <a:r>
+              <a:rPr lang="en-US" sz="4400" dirty="0"/>
+              <a:t>Transformer isolated four port output</a:t>
+            </a:r>
+          </a:p>
+          <a:p>
+            <a:pPr marL="571500" indent="-571500">
+              <a:buFont typeface="Arial" panose="020B0604020202020204" pitchFamily="34" charset="0"/>
+              <a:buChar char="•"/>
+            </a:pPr>
+            <a:r>
+              <a:rPr lang="en-US" sz="4400" dirty="0"/>
+              <a:t>Onboard battery</a:t>
+            </a:r>
+          </a:p>
+          <a:p>
+            <a:pPr marL="571500" indent="-571500">
+              <a:buFont typeface="Arial" panose="020B0604020202020204" pitchFamily="34" charset="0"/>
+              <a:buChar char="•"/>
+            </a:pPr>
+            <a:r>
+              <a:rPr lang="en-US" sz="4400" dirty="0"/>
+              <a:t>Feedback ADCs for current monitoring</a:t>
+            </a:r>
+          </a:p>
+        </p:txBody>
+      </p:sp>
+      <p:sp>
+        <p:nvSpPr>
+          <p:cNvPr id="19" name="TextBox 18">
+            <a:extLst>
+              <a:ext uri="{FF2B5EF4-FFF2-40B4-BE49-F238E27FC236}">
+                <a16:creationId xmlns:a16="http://schemas.microsoft.com/office/drawing/2014/main" id="{29AF4C4A-93C7-CBA3-80DC-E6B978533DFD}"/>
+              </a:ext>
+            </a:extLst>
+          </p:cNvPr>
+          <p:cNvSpPr txBox="1"/>
+          <p:nvPr/>
+        </p:nvSpPr>
+        <p:spPr>
+          <a:xfrm>
+            <a:off x="26056430" y="6342027"/>
+            <a:ext cx="12443620" cy="10926068"/>
+          </a:xfrm>
+          <a:prstGeom prst="rect">
+            <a:avLst/>
+          </a:prstGeom>
+          <a:noFill/>
+        </p:spPr>
+        <p:txBody>
+          <a:bodyPr wrap="square">
+            <a:spAutoFit/>
+          </a:bodyPr>
+          <a:lstStyle/>
+          <a:p>
+            <a:r>
+              <a:rPr lang="en-US" sz="4400" dirty="0"/>
+              <a:t>What went right?</a:t>
+            </a:r>
+          </a:p>
+          <a:p>
+            <a:pPr marL="571500" indent="-571500">
+              <a:buFont typeface="Arial" panose="020B0604020202020204" pitchFamily="34" charset="0"/>
+              <a:buChar char="•"/>
+            </a:pPr>
+            <a:r>
+              <a:rPr lang="en-US" sz="4400" dirty="0"/>
+              <a:t>DDS programmability verified</a:t>
+            </a:r>
+          </a:p>
+          <a:p>
+            <a:pPr marL="571500" indent="-571500">
+              <a:buFont typeface="Arial" panose="020B0604020202020204" pitchFamily="34" charset="0"/>
+              <a:buChar char="•"/>
+            </a:pPr>
+            <a:r>
+              <a:rPr lang="en-US" sz="4400" dirty="0"/>
+              <a:t>Isolated ADC feedback verified</a:t>
+            </a:r>
+          </a:p>
+          <a:p>
+            <a:pPr marL="571500" indent="-571500">
+              <a:buFont typeface="Arial" panose="020B0604020202020204" pitchFamily="34" charset="0"/>
+              <a:buChar char="•"/>
+            </a:pPr>
+            <a:r>
+              <a:rPr lang="en-US" sz="4400" dirty="0"/>
+              <a:t>Battery voltage and charging verified</a:t>
+            </a:r>
+          </a:p>
+          <a:p>
+            <a:pPr marL="571500" indent="-571500">
+              <a:buFont typeface="Arial" panose="020B0604020202020204" pitchFamily="34" charset="0"/>
+              <a:buChar char="•"/>
+            </a:pPr>
+            <a:r>
+              <a:rPr lang="en-US" sz="4400" dirty="0"/>
+              <a:t>Bluetooth functionality and web app verified</a:t>
+            </a:r>
+          </a:p>
+          <a:p>
+            <a:pPr marL="571500" indent="-571500">
+              <a:buFont typeface="Arial" panose="020B0604020202020204" pitchFamily="34" charset="0"/>
+              <a:buChar char="•"/>
+            </a:pPr>
+            <a:endParaRPr lang="en-US" sz="4400" dirty="0"/>
+          </a:p>
+          <a:p>
+            <a:r>
+              <a:rPr lang="en-US" sz="4400" dirty="0"/>
+              <a:t>What caused issues?</a:t>
+            </a:r>
+          </a:p>
+          <a:p>
+            <a:pPr marL="571500" indent="-571500">
+              <a:buFont typeface="Arial" panose="020B0604020202020204" pitchFamily="34" charset="0"/>
+              <a:buChar char="•"/>
+            </a:pPr>
+            <a:r>
+              <a:rPr lang="en-US" sz="4400" dirty="0"/>
+              <a:t>Large current draw from +/-30 V boost converter</a:t>
+            </a:r>
+          </a:p>
+          <a:p>
+            <a:pPr marL="571500" indent="-571500">
+              <a:buFont typeface="Arial" panose="020B0604020202020204" pitchFamily="34" charset="0"/>
+              <a:buChar char="•"/>
+            </a:pPr>
+            <a:r>
+              <a:rPr lang="en-US" sz="4400" dirty="0"/>
+              <a:t>Insufficient current sourcing from 12 V boost converter</a:t>
+            </a:r>
+          </a:p>
+          <a:p>
+            <a:pPr marL="571500" indent="-571500">
+              <a:buFont typeface="Arial" panose="020B0604020202020204" pitchFamily="34" charset="0"/>
+              <a:buChar char="•"/>
+            </a:pPr>
+            <a:r>
+              <a:rPr lang="en-US" sz="4400" dirty="0"/>
+              <a:t>Isolated thermal concerns at larger currents</a:t>
+            </a:r>
+          </a:p>
+          <a:p>
+            <a:pPr marL="571500" indent="-571500">
+              <a:buFont typeface="Arial" panose="020B0604020202020204" pitchFamily="34" charset="0"/>
+              <a:buChar char="•"/>
+            </a:pPr>
+            <a:endParaRPr lang="en-US" sz="4400" dirty="0"/>
+          </a:p>
+          <a:p>
+            <a:r>
+              <a:rPr lang="en-US" sz="4400" dirty="0"/>
+              <a:t>Summary:</a:t>
+            </a:r>
+          </a:p>
+          <a:p>
+            <a:r>
+              <a:rPr lang="en-US" sz="4400" dirty="0"/>
+              <a:t>We were unable to achieve full functionality, but are hopeful that tweaks to power supply circuitry will make the device function properly</a:t>
+            </a:r>
+          </a:p>
+        </p:txBody>
+      </p:sp>
+      <p:sp>
+        <p:nvSpPr>
+          <p:cNvPr id="21" name="TextBox 20">
+            <a:extLst>
+              <a:ext uri="{FF2B5EF4-FFF2-40B4-BE49-F238E27FC236}">
+                <a16:creationId xmlns:a16="http://schemas.microsoft.com/office/drawing/2014/main" id="{4435C989-D361-0049-5DA5-069E2CD565B2}"/>
+              </a:ext>
+            </a:extLst>
+          </p:cNvPr>
+          <p:cNvSpPr txBox="1"/>
+          <p:nvPr/>
+        </p:nvSpPr>
+        <p:spPr>
+          <a:xfrm>
+            <a:off x="26004930" y="18934850"/>
+            <a:ext cx="12426458" cy="4154984"/>
+          </a:xfrm>
+          <a:prstGeom prst="rect">
+            <a:avLst/>
+          </a:prstGeom>
+          <a:noFill/>
+        </p:spPr>
+        <p:txBody>
+          <a:bodyPr wrap="square">
+            <a:spAutoFit/>
+          </a:bodyPr>
+          <a:lstStyle/>
+          <a:p>
+            <a:pPr marL="571500" indent="-571500">
+              <a:buFont typeface="Arial" panose="020B0604020202020204" pitchFamily="34" charset="0"/>
+              <a:buChar char="•"/>
+            </a:pPr>
+            <a:r>
+              <a:rPr lang="en-US" sz="4400" dirty="0"/>
+              <a:t>Redo power circuitry</a:t>
+            </a:r>
+          </a:p>
+          <a:p>
+            <a:pPr marL="993838" lvl="1" indent="-571500">
+              <a:buFont typeface="Arial" panose="020B0604020202020204" pitchFamily="34" charset="0"/>
+              <a:buChar char="•"/>
+            </a:pPr>
+            <a:r>
+              <a:rPr lang="en-US" sz="4400" dirty="0"/>
+              <a:t>Make custom 12 V converter</a:t>
+            </a:r>
+          </a:p>
+          <a:p>
+            <a:pPr marL="993838" lvl="1" indent="-571500">
+              <a:buFont typeface="Arial" panose="020B0604020202020204" pitchFamily="34" charset="0"/>
+              <a:buChar char="•"/>
+            </a:pPr>
+            <a:r>
+              <a:rPr lang="en-US" sz="4400" dirty="0"/>
+              <a:t>Reduce size of +/- 30 V converter to draw less current</a:t>
+            </a:r>
+          </a:p>
+          <a:p>
+            <a:pPr marL="571500" indent="-571500">
+              <a:buFont typeface="Arial" panose="020B0604020202020204" pitchFamily="34" charset="0"/>
+              <a:buChar char="•"/>
+            </a:pPr>
+            <a:r>
+              <a:rPr lang="en-US" sz="4400" dirty="0"/>
+              <a:t>Update housing to hold battery charger</a:t>
+            </a:r>
+          </a:p>
+          <a:p>
+            <a:pPr marL="571500" indent="-571500">
+              <a:buFont typeface="Arial" panose="020B0604020202020204" pitchFamily="34" charset="0"/>
+              <a:buChar char="•"/>
+            </a:pPr>
+            <a:r>
+              <a:rPr lang="en-US" sz="4400" dirty="0"/>
+              <a:t>Add indicators to device</a:t>
+            </a:r>
+          </a:p>
+        </p:txBody>
+      </p:sp>
+      <p:sp>
+        <p:nvSpPr>
+          <p:cNvPr id="23" name="TextBox 22">
+            <a:extLst>
+              <a:ext uri="{FF2B5EF4-FFF2-40B4-BE49-F238E27FC236}">
+                <a16:creationId xmlns:a16="http://schemas.microsoft.com/office/drawing/2014/main" id="{880A098E-89CA-637E-AA67-8C73CD6B56AE}"/>
+              </a:ext>
+            </a:extLst>
+          </p:cNvPr>
+          <p:cNvSpPr txBox="1"/>
+          <p:nvPr/>
+        </p:nvSpPr>
+        <p:spPr>
+          <a:xfrm>
+            <a:off x="13835046" y="6295843"/>
+            <a:ext cx="11840835" cy="7540526"/>
+          </a:xfrm>
+          <a:prstGeom prst="rect">
+            <a:avLst/>
+          </a:prstGeom>
+          <a:noFill/>
+        </p:spPr>
+        <p:txBody>
+          <a:bodyPr wrap="square">
+            <a:spAutoFit/>
+          </a:bodyPr>
+          <a:lstStyle/>
+          <a:p>
+            <a:pPr marL="571500" indent="-571500">
+              <a:buFont typeface="Arial" panose="020B0604020202020204" pitchFamily="34" charset="0"/>
+              <a:buChar char="•"/>
+            </a:pPr>
+            <a:r>
+              <a:rPr lang="en-US" sz="4400" dirty="0"/>
+              <a:t>Existing stimulators are expensive and not portable</a:t>
+            </a:r>
+          </a:p>
+          <a:p>
+            <a:pPr marL="571500" indent="-571500">
+              <a:buFont typeface="Arial" panose="020B0604020202020204" pitchFamily="34" charset="0"/>
+              <a:buChar char="•"/>
+            </a:pPr>
+            <a:r>
+              <a:rPr lang="en-US" sz="4400" dirty="0"/>
+              <a:t>Participants in studies need to be blinded to whether they are being stimulated</a:t>
+            </a:r>
+          </a:p>
+          <a:p>
+            <a:pPr marL="571500" indent="-571500">
+              <a:buFont typeface="Arial" panose="020B0604020202020204" pitchFamily="34" charset="0"/>
+              <a:buChar char="•"/>
+            </a:pPr>
+            <a:r>
+              <a:rPr lang="en-US" sz="4400" dirty="0"/>
+              <a:t>Current research relies on brand proprietary components</a:t>
+            </a:r>
+          </a:p>
+          <a:p>
+            <a:pPr marL="571500" indent="-571500">
+              <a:buFont typeface="Arial" panose="020B0604020202020204" pitchFamily="34" charset="0"/>
+              <a:buChar char="•"/>
+            </a:pPr>
+            <a:endParaRPr lang="en-US" sz="4400" dirty="0"/>
+          </a:p>
+          <a:p>
+            <a:r>
+              <a:rPr lang="en-US" sz="4400" dirty="0"/>
+              <a:t>We addressed these issues by making a portable, wireless brain stimulator that can be programmed remotely over Bluetooth and hides stimulation status from the user.</a:t>
+            </a:r>
+          </a:p>
+        </p:txBody>
+      </p:sp>
+      <p:sp>
+        <p:nvSpPr>
+          <p:cNvPr id="24" name="TextBox 23">
+            <a:extLst>
+              <a:ext uri="{FF2B5EF4-FFF2-40B4-BE49-F238E27FC236}">
+                <a16:creationId xmlns:a16="http://schemas.microsoft.com/office/drawing/2014/main" id="{B8125472-427A-0E1D-99AB-6043874583F4}"/>
+              </a:ext>
+            </a:extLst>
+          </p:cNvPr>
+          <p:cNvSpPr txBox="1"/>
+          <p:nvPr/>
+        </p:nvSpPr>
+        <p:spPr>
+          <a:xfrm>
+            <a:off x="13817881" y="20734565"/>
+            <a:ext cx="11840836" cy="4154984"/>
+          </a:xfrm>
+          <a:prstGeom prst="rect">
+            <a:avLst/>
+          </a:prstGeom>
+          <a:noFill/>
+        </p:spPr>
+        <p:txBody>
+          <a:bodyPr wrap="square">
+            <a:spAutoFit/>
+          </a:bodyPr>
+          <a:lstStyle/>
+          <a:p>
+            <a:pPr marL="571500" indent="-571500">
+              <a:buFont typeface="Arial" panose="020B0604020202020204" pitchFamily="34" charset="0"/>
+              <a:buChar char="•"/>
+            </a:pPr>
+            <a:r>
+              <a:rPr lang="en-US" sz="4400" dirty="0"/>
+              <a:t>Two slightly different frequencies create a “beat frequency” at the difference of their frequencies</a:t>
+            </a:r>
+          </a:p>
+          <a:p>
+            <a:pPr marL="571500" indent="-571500">
+              <a:buFont typeface="Arial" panose="020B0604020202020204" pitchFamily="34" charset="0"/>
+              <a:buChar char="•"/>
+            </a:pPr>
+            <a:r>
+              <a:rPr lang="en-US" sz="4400" dirty="0"/>
+              <a:t>Using isolated loops and electrodes, can send higher frequency current oscillations along the surface of the head to create low frequency pulses deep in the brain</a:t>
+            </a:r>
+          </a:p>
+        </p:txBody>
+      </p:sp>
+      <p:pic>
+        <p:nvPicPr>
+          <p:cNvPr id="27" name="Picture 26" descr="A computer chip with many different colored parts&#10;&#10;AI-generated content may be incorrect.">
+            <a:extLst>
+              <a:ext uri="{FF2B5EF4-FFF2-40B4-BE49-F238E27FC236}">
+                <a16:creationId xmlns:a16="http://schemas.microsoft.com/office/drawing/2014/main" id="{DB773AF6-1121-CA85-5C64-604369853F23}"/>
+              </a:ext>
+            </a:extLst>
+          </p:cNvPr>
+          <p:cNvPicPr>
+            <a:picLocks noChangeAspect="1"/>
+          </p:cNvPicPr>
+          <p:nvPr/>
+        </p:nvPicPr>
+        <p:blipFill>
+          <a:blip r:embed="rId5"/>
+          <a:stretch>
+            <a:fillRect/>
+          </a:stretch>
+        </p:blipFill>
+        <p:spPr>
+          <a:xfrm>
+            <a:off x="13660114" y="14035855"/>
+            <a:ext cx="4581790" cy="5058524"/>
+          </a:xfrm>
+          <a:prstGeom prst="rect">
+            <a:avLst/>
+          </a:prstGeom>
+        </p:spPr>
+      </p:pic>
+      <p:pic>
+        <p:nvPicPr>
+          <p:cNvPr id="29" name="Picture 28" descr="A screen with a green line&#10;&#10;AI-generated content may be incorrect.">
+            <a:extLst>
+              <a:ext uri="{FF2B5EF4-FFF2-40B4-BE49-F238E27FC236}">
+                <a16:creationId xmlns:a16="http://schemas.microsoft.com/office/drawing/2014/main" id="{54F07C96-B751-D418-3945-0ED232070BB7}"/>
+              </a:ext>
+            </a:extLst>
+          </p:cNvPr>
+          <p:cNvPicPr>
+            <a:picLocks noChangeAspect="1"/>
+          </p:cNvPicPr>
+          <p:nvPr/>
+        </p:nvPicPr>
+        <p:blipFill>
+          <a:blip r:embed="rId6"/>
+          <a:stretch>
+            <a:fillRect/>
+          </a:stretch>
+        </p:blipFill>
+        <p:spPr>
+          <a:xfrm>
+            <a:off x="18246450" y="14577097"/>
+            <a:ext cx="7664143" cy="4099518"/>
+          </a:xfrm>
+          <a:prstGeom prst="rect">
+            <a:avLst/>
+          </a:prstGeom>
         </p:spPr>
       </p:pic>
     </p:spTree>

--- a/Final_Report/Figures/CapstonePosterDraft.pptx
+++ b/Final_Report/Figures/CapstonePosterDraft.pptx
@@ -3779,7 +3779,7 @@
         <p:spPr>
           <a:xfrm>
             <a:off x="26022097" y="4963152"/>
-            <a:ext cx="12477953" cy="25897847"/>
+            <a:ext cx="12477953" cy="23740575"/>
           </a:xfrm>
           <a:prstGeom prst="rect">
             <a:avLst/>
@@ -4207,7 +4207,7 @@
         <p:spPr>
           <a:xfrm>
             <a:off x="819150" y="6533936"/>
-            <a:ext cx="12211050" cy="6863417"/>
+            <a:ext cx="12211050" cy="7540526"/>
           </a:xfrm>
           <a:prstGeom prst="rect">
             <a:avLst/>
@@ -4222,7 +4222,7 @@
           <a:p>
             <a:r>
               <a:rPr lang="en-US" sz="4400" dirty="0"/>
-              <a:t>Deep brain stimulation (DBS) has emerged as a highly effective neuromodulation technique for treating several neurological disorders, most notably Parkinson’s disease, where it has significantly improved motor symptoms and quality of life for thousands of patients. Building on its clinical success, recent research has explored DBS as a potential therapy for severe opioid addiction, with early studies demonstrating promising outcomes in reducing cravings and supporting long-term recovery.</a:t>
+              <a:t>Deep brain stimulation (DBS) has emerged as a highly effective neuromodulation technique for treating several neurological disorders, most notably Parkinson’s disease, where it has significantly improved motor symptoms and quality of life for thousands of patients. Building on its clinical success, recent research has explored DBS as a potential therapy for severe opioid addiction, with early studies demonstrating promising outcomes in reducing cravings and supporting long-term recovery [1].</a:t>
             </a:r>
           </a:p>
         </p:txBody>
@@ -4695,7 +4695,7 @@
             </a:pPr>
             <a:r>
               <a:rPr lang="en-US" sz="4400" dirty="0"/>
-              <a:t>Using isolated loops and electrodes, can send higher frequency current oscillations along the surface of the head to create low frequency pulses deep in the brain</a:t>
+              <a:t>Using isolated loops and electrodes, can send higher frequency current oscillations along the surface of the head to create low frequency pulses deep in the brain [1]</a:t>
             </a:r>
           </a:p>
         </p:txBody>
@@ -4760,6 +4760,92 @@
           </a:prstGeom>
         </p:spPr>
       </p:pic>
+      <p:sp>
+        <p:nvSpPr>
+          <p:cNvPr id="5" name="TextBox 4">
+            <a:extLst>
+              <a:ext uri="{FF2B5EF4-FFF2-40B4-BE49-F238E27FC236}">
+                <a16:creationId xmlns:a16="http://schemas.microsoft.com/office/drawing/2014/main" id="{19505D02-568E-9205-EF59-F29038470113}"/>
+              </a:ext>
+            </a:extLst>
+          </p:cNvPr>
+          <p:cNvSpPr txBox="1"/>
+          <p:nvPr/>
+        </p:nvSpPr>
+        <p:spPr>
+          <a:xfrm>
+            <a:off x="26056431" y="25769185"/>
+            <a:ext cx="12374958" cy="2800767"/>
+          </a:xfrm>
+          <a:prstGeom prst="rect">
+            <a:avLst/>
+          </a:prstGeom>
+          <a:noFill/>
+        </p:spPr>
+        <p:txBody>
+          <a:bodyPr wrap="square">
+            <a:spAutoFit/>
+          </a:bodyPr>
+          <a:lstStyle/>
+          <a:p>
+            <a:r>
+              <a:rPr lang="en-US" sz="4400" dirty="0"/>
+              <a:t>[1]   N. Grossman, et. al. “Noninvasive deep brain stimulation via temporally interfering electric fields,” </a:t>
+            </a:r>
+            <a:r>
+              <a:rPr lang="en-US" sz="4400" i="1" dirty="0"/>
+              <a:t>Cell</a:t>
+            </a:r>
+            <a:r>
+              <a:rPr lang="en-US" sz="4400" dirty="0"/>
+              <a:t>, vol. 169, no. 6, pp 1029-1041, June 1, 2017, </a:t>
+            </a:r>
+            <a:r>
+              <a:rPr lang="en-US" sz="4400" dirty="0" err="1"/>
+              <a:t>doi</a:t>
+            </a:r>
+            <a:r>
+              <a:rPr lang="en-US" sz="4400" dirty="0"/>
+              <a:t>: 10.1016/j.cell.2017.05.024.</a:t>
+            </a:r>
+          </a:p>
+        </p:txBody>
+      </p:sp>
+      <p:sp>
+        <p:nvSpPr>
+          <p:cNvPr id="16" name="TextBox 15">
+            <a:extLst>
+              <a:ext uri="{FF2B5EF4-FFF2-40B4-BE49-F238E27FC236}">
+                <a16:creationId xmlns:a16="http://schemas.microsoft.com/office/drawing/2014/main" id="{FB554BB8-4860-74C9-1BE8-E88BF4ECCE21}"/>
+              </a:ext>
+            </a:extLst>
+          </p:cNvPr>
+          <p:cNvSpPr txBox="1"/>
+          <p:nvPr/>
+        </p:nvSpPr>
+        <p:spPr>
+          <a:xfrm>
+            <a:off x="26056430" y="28943215"/>
+            <a:ext cx="12477953" cy="2123658"/>
+          </a:xfrm>
+          <a:prstGeom prst="rect">
+            <a:avLst/>
+          </a:prstGeom>
+          <a:noFill/>
+        </p:spPr>
+        <p:txBody>
+          <a:bodyPr wrap="square">
+            <a:spAutoFit/>
+          </a:bodyPr>
+          <a:lstStyle/>
+          <a:p>
+            <a:r>
+              <a:rPr lang="en-US" sz="4400" i="1" dirty="0"/>
+              <a:t>Project done in conjunction with Joshua Brown, Professor of Psychological and Brain Sciences at Indiana University Bloomington</a:t>
+            </a:r>
+          </a:p>
+        </p:txBody>
+      </p:sp>
     </p:spTree>
   </p:cSld>
   <p:clrMapOvr>
